--- a/SRMIST_Puchkaz_Submission_ppt.pptx
+++ b/SRMIST_Puchkaz_Submission_ppt.pptx
@@ -5,7 +5,7 @@
     <p:sldMasterId id="2147483648" r:id="rId1"/>
   </p:sldMasterIdLst>
   <p:notesMasterIdLst>
-    <p:notesMasterId r:id="rId15"/>
+    <p:notesMasterId r:id="rId18"/>
   </p:notesMasterIdLst>
   <p:sldIdLst>
     <p:sldId id="256" r:id="rId2"/>
@@ -14,13 +14,16 @@
     <p:sldId id="259" r:id="rId5"/>
     <p:sldId id="268" r:id="rId6"/>
     <p:sldId id="260" r:id="rId7"/>
-    <p:sldId id="261" r:id="rId8"/>
-    <p:sldId id="262" r:id="rId9"/>
-    <p:sldId id="263" r:id="rId10"/>
-    <p:sldId id="264" r:id="rId11"/>
-    <p:sldId id="265" r:id="rId12"/>
-    <p:sldId id="266" r:id="rId13"/>
-    <p:sldId id="267" r:id="rId14"/>
+    <p:sldId id="269" r:id="rId8"/>
+    <p:sldId id="270" r:id="rId9"/>
+    <p:sldId id="271" r:id="rId10"/>
+    <p:sldId id="261" r:id="rId11"/>
+    <p:sldId id="262" r:id="rId12"/>
+    <p:sldId id="263" r:id="rId13"/>
+    <p:sldId id="264" r:id="rId14"/>
+    <p:sldId id="265" r:id="rId15"/>
+    <p:sldId id="266" r:id="rId16"/>
+    <p:sldId id="267" r:id="rId17"/>
   </p:sldIdLst>
   <p:sldSz cx="12192000" cy="6858000"/>
   <p:notesSz cx="6858000" cy="9144000"/>
@@ -258,7 +261,7 @@
       <p15:sldGuideLst xmlns:p15="http://schemas.microsoft.com/office/powerpoint/2012/main"/>
     </p:ext>
     <p:ext uri="GoogleSlidesCustomDataVersion2">
-      <go:slidesCustomData xmlns:go="http://customooxmlschemas.google.com/" xmlns:ahyp="http://schemas.microsoft.com/office/drawing/2018/hyperlinkcolor" xmlns:p15="http://schemas.microsoft.com/office/powerpoint/2012/main" xmlns:p14="http://schemas.microsoft.com/office/powerpoint/2010/main" xmlns:com="http://schemas.openxmlformats.org/drawingml/2006/compatibility" xmlns:pvml="urn:schemas-microsoft-com:office:powerpoint" xmlns:v="urn:schemas-microsoft-com:vml" xmlns:o="urn:schemas-microsoft-com:office:office" xmlns:dgm="http://schemas.openxmlformats.org/drawingml/2006/diagram" xmlns:c="http://schemas.openxmlformats.org/drawingml/2006/chart" xmlns:mv="urn:schemas-microsoft-com:mac:vml" xmlns:mc="http://schemas.openxmlformats.org/markup-compatibility/2006" xmlns="" r:id="rId17" roundtripDataSignature="AMtx7mgQuomGbdS/wh2yqkB/K4YAZ70YAw=="/>
+      <go:slidesCustomData xmlns="" xmlns:mc="http://schemas.openxmlformats.org/markup-compatibility/2006" xmlns:mv="urn:schemas-microsoft-com:mac:vml" xmlns:c="http://schemas.openxmlformats.org/drawingml/2006/chart" xmlns:dgm="http://schemas.openxmlformats.org/drawingml/2006/diagram" xmlns:o="urn:schemas-microsoft-com:office:office" xmlns:v="urn:schemas-microsoft-com:vml" xmlns:pvml="urn:schemas-microsoft-com:office:powerpoint" xmlns:com="http://schemas.openxmlformats.org/drawingml/2006/compatibility" xmlns:p14="http://schemas.microsoft.com/office/powerpoint/2010/main" xmlns:p15="http://schemas.microsoft.com/office/powerpoint/2012/main" xmlns:ahyp="http://schemas.microsoft.com/office/drawing/2018/hyperlinkcolor" xmlns:go="http://customooxmlschemas.google.com/" r:id="rId19" roundtripDataSignature="AMtx7mgQuomGbdS/wh2yqkB/K4YAZ70YAw=="/>
     </p:ext>
   </p:extLst>
 </p:presentation>
@@ -2031,7 +2034,7 @@
             </a:pPr>
             <a:fld id="{00000000-1234-1234-1234-123412341234}" type="slidenum">
               <a:rPr lang="en-US"/>
-              <a:t>13</a:t>
+              <a:t>16</a:t>
             </a:fld>
             <a:endParaRPr/>
           </a:p>
@@ -13655,6 +13658,684 @@
   <p:cSld>
     <p:spTree>
       <p:nvGrpSpPr>
+        <p:cNvPr id="1" name="Shape 124"/>
+        <p:cNvGrpSpPr/>
+        <p:nvPr/>
+      </p:nvGrpSpPr>
+      <p:grpSpPr>
+        <a:xfrm>
+          <a:off x="0" y="0"/>
+          <a:ext cx="0" cy="0"/>
+          <a:chOff x="0" y="0"/>
+          <a:chExt cx="0" cy="0"/>
+        </a:xfrm>
+      </p:grpSpPr>
+      <p:sp>
+        <p:nvSpPr>
+          <p:cNvPr id="125" name="Google Shape;125;p6"/>
+          <p:cNvSpPr txBox="1">
+            <a:spLocks noGrp="1"/>
+          </p:cNvSpPr>
+          <p:nvPr>
+            <p:ph type="title"/>
+          </p:nvPr>
+        </p:nvSpPr>
+        <p:spPr>
+          <a:xfrm>
+            <a:off x="838200" y="365125"/>
+            <a:ext cx="10515600" cy="1325563"/>
+          </a:xfrm>
+          <a:prstGeom prst="rect">
+            <a:avLst/>
+          </a:prstGeom>
+          <a:noFill/>
+          <a:ln>
+            <a:noFill/>
+          </a:ln>
+        </p:spPr>
+        <p:txBody>
+          <a:bodyPr spcFirstLastPara="1" wrap="square" lIns="91425" tIns="45700" rIns="91425" bIns="45700" anchor="ctr" anchorCtr="0">
+            <a:normAutofit/>
+          </a:bodyPr>
+          <a:lstStyle/>
+          <a:p>
+            <a:pPr marL="0" lvl="0" indent="0" algn="l" rtl="0">
+              <a:lnSpc>
+                <a:spcPct val="90000"/>
+              </a:lnSpc>
+              <a:spcBef>
+                <a:spcPts val="0"/>
+              </a:spcBef>
+              <a:spcAft>
+                <a:spcPts val="0"/>
+              </a:spcAft>
+              <a:buClr>
+                <a:srgbClr val="704EA6"/>
+              </a:buClr>
+              <a:buSzPts val="4400"/>
+              <a:buFont typeface="Calibri"/>
+              <a:buNone/>
+            </a:pPr>
+            <a:r>
+              <a:rPr lang="en-US" sz="4400" b="1" dirty="0">
+                <a:solidFill>
+                  <a:srgbClr val="704EA6"/>
+                </a:solidFill>
+                <a:latin typeface="Calibri"/>
+                <a:ea typeface="Calibri"/>
+                <a:cs typeface="Calibri"/>
+                <a:sym typeface="Calibri"/>
+              </a:rPr>
+              <a:t>Tools and tech stack used</a:t>
+            </a:r>
+            <a:endParaRPr b="1" dirty="0">
+              <a:solidFill>
+                <a:srgbClr val="704EA6"/>
+              </a:solidFill>
+            </a:endParaRPr>
+          </a:p>
+        </p:txBody>
+      </p:sp>
+      <p:sp>
+        <p:nvSpPr>
+          <p:cNvPr id="126" name="Google Shape;126;p6"/>
+          <p:cNvSpPr txBox="1">
+            <a:spLocks noGrp="1"/>
+          </p:cNvSpPr>
+          <p:nvPr>
+            <p:ph type="body" idx="1"/>
+          </p:nvPr>
+        </p:nvSpPr>
+        <p:spPr>
+          <a:xfrm>
+            <a:off x="272716" y="1858252"/>
+            <a:ext cx="11646568" cy="4351338"/>
+          </a:xfrm>
+          <a:prstGeom prst="rect">
+            <a:avLst/>
+          </a:prstGeom>
+          <a:noFill/>
+          <a:ln>
+            <a:noFill/>
+          </a:ln>
+        </p:spPr>
+        <p:txBody>
+          <a:bodyPr spcFirstLastPara="1" wrap="square" lIns="91425" tIns="45700" rIns="91425" bIns="45700" anchor="t" anchorCtr="0">
+            <a:normAutofit fontScale="85000" lnSpcReduction="20000"/>
+          </a:bodyPr>
+          <a:lstStyle/>
+          <a:p>
+            <a:pPr lvl="0"/>
+            <a:r>
+              <a:rPr lang="en-IN" b="1" dirty="0"/>
+              <a:t>Language and API:</a:t>
+            </a:r>
+            <a:r>
+              <a:rPr lang="en-IN" dirty="0"/>
+              <a:t> Python 3.11, </a:t>
+            </a:r>
+            <a:r>
+              <a:rPr lang="en-IN" dirty="0" err="1"/>
+              <a:t>FastAPI</a:t>
+            </a:r>
+            <a:r>
+              <a:rPr lang="en-IN" dirty="0"/>
+              <a:t>, </a:t>
+            </a:r>
+            <a:r>
+              <a:rPr lang="en-IN" dirty="0" err="1"/>
+              <a:t>Uvicorn</a:t>
+            </a:r>
+            <a:r>
+              <a:rPr lang="en-IN" dirty="0"/>
+              <a:t>, </a:t>
+            </a:r>
+            <a:r>
+              <a:rPr lang="en-IN" dirty="0" err="1"/>
+              <a:t>Pydantic</a:t>
+            </a:r>
+            <a:r>
+              <a:rPr lang="en-IN" dirty="0"/>
+              <a:t> (the official schema.py contract)</a:t>
+            </a:r>
+          </a:p>
+          <a:p>
+            <a:pPr lvl="0"/>
+            <a:r>
+              <a:rPr lang="en-IN" b="1" dirty="0"/>
+              <a:t>LLM:</a:t>
+            </a:r>
+            <a:r>
+              <a:rPr lang="en-IN" dirty="0"/>
+              <a:t> Gemini (gemini-3.5-flash-lite) via a pluggable client. OpenAI, Anthropic and an offline mock are also supported. temperature=0, response </a:t>
+            </a:r>
+            <a:r>
+              <a:rPr lang="en-IN" dirty="0" err="1"/>
+              <a:t>memoization</a:t>
+            </a:r>
+            <a:r>
+              <a:rPr lang="en-IN" dirty="0"/>
+              <a:t>, 30 s timeout guard, per-request token cost tracking.</a:t>
+            </a:r>
+          </a:p>
+          <a:p>
+            <a:pPr lvl="0"/>
+            <a:r>
+              <a:rPr lang="en-IN" b="1" dirty="0"/>
+              <a:t>Retrieval and embeddings:</a:t>
+            </a:r>
+            <a:r>
+              <a:rPr lang="en-IN" dirty="0"/>
+              <a:t> scikit-learn char n-gram TF-IDF (3–5, </a:t>
+            </a:r>
+            <a:r>
+              <a:rPr lang="en-IN" dirty="0" err="1"/>
+              <a:t>char_wb</a:t>
+            </a:r>
+            <a:r>
+              <a:rPr lang="en-IN" dirty="0"/>
+              <a:t>) with cosine similarity over sparse matrices (SciPy and NumPy). This was chosen because </a:t>
+            </a:r>
+            <a:r>
+              <a:rPr lang="en-IN" dirty="0" err="1"/>
+              <a:t>HuggingFace</a:t>
+            </a:r>
+            <a:r>
+              <a:rPr lang="en-IN" dirty="0"/>
+              <a:t> was blocked on our network. Fully offline, typo-tolerant, and the Embedder protocol lets a dense model drop in later.</a:t>
+            </a:r>
+          </a:p>
+          <a:p>
+            <a:pPr lvl="0"/>
+            <a:r>
+              <a:rPr lang="en-IN" b="1" dirty="0"/>
+              <a:t>Cache:</a:t>
+            </a:r>
+            <a:r>
+              <a:rPr lang="en-IN" dirty="0"/>
+              <a:t> in-memory semantic cache, device-gated, thread-safe, pre-warmed from </a:t>
+            </a:r>
+            <a:r>
+              <a:rPr lang="en-IN" dirty="0" err="1"/>
+              <a:t>results.jsonl</a:t>
+            </a:r>
+            <a:endParaRPr lang="en-IN" dirty="0"/>
+          </a:p>
+          <a:p>
+            <a:pPr lvl="0"/>
+            <a:r>
+              <a:rPr lang="en-IN" b="1" dirty="0"/>
+              <a:t>Quality:</a:t>
+            </a:r>
+            <a:r>
+              <a:rPr lang="en-IN" dirty="0"/>
+              <a:t> </a:t>
+            </a:r>
+            <a:r>
+              <a:rPr lang="en-IN" dirty="0" err="1"/>
+              <a:t>pytest</a:t>
+            </a:r>
+            <a:r>
+              <a:rPr lang="en-IN" dirty="0"/>
+              <a:t> (119 test functions), validation scripts, benchmark scripts</a:t>
+            </a:r>
+          </a:p>
+          <a:p>
+            <a:pPr lvl="0"/>
+            <a:r>
+              <a:rPr lang="en-IN" b="1" dirty="0"/>
+              <a:t>Deploy:</a:t>
+            </a:r>
+            <a:r>
+              <a:rPr lang="en-IN" dirty="0"/>
+              <a:t> Docker (python:3.11-slim, </a:t>
+            </a:r>
+            <a:r>
+              <a:rPr lang="en-IN" dirty="0" err="1"/>
+              <a:t>healthcheck</a:t>
+            </a:r>
+            <a:r>
+              <a:rPr lang="en-IN" dirty="0"/>
+              <a:t>, vectorizer built at image build time)</a:t>
+            </a:r>
+          </a:p>
+        </p:txBody>
+      </p:sp>
+    </p:spTree>
+  </p:cSld>
+  <p:clrMapOvr>
+    <a:masterClrMapping/>
+  </p:clrMapOvr>
+</p:sld>
+</file>
+
+<file path=ppt/slides/slide11.xml><?xml version="1.0" encoding="utf-8"?>
+<p:sld xmlns:a="http://schemas.openxmlformats.org/drawingml/2006/main" xmlns:r="http://schemas.openxmlformats.org/officeDocument/2006/relationships" xmlns:p="http://schemas.openxmlformats.org/presentationml/2006/main">
+  <p:cSld>
+    <p:spTree>
+      <p:nvGrpSpPr>
+        <p:cNvPr id="1" name="Shape 130"/>
+        <p:cNvGrpSpPr/>
+        <p:nvPr/>
+      </p:nvGrpSpPr>
+      <p:grpSpPr>
+        <a:xfrm>
+          <a:off x="0" y="0"/>
+          <a:ext cx="0" cy="0"/>
+          <a:chOff x="0" y="0"/>
+          <a:chExt cx="0" cy="0"/>
+        </a:xfrm>
+      </p:grpSpPr>
+      <p:sp>
+        <p:nvSpPr>
+          <p:cNvPr id="131" name="Google Shape;131;p7"/>
+          <p:cNvSpPr txBox="1">
+            <a:spLocks noGrp="1"/>
+          </p:cNvSpPr>
+          <p:nvPr>
+            <p:ph type="title"/>
+          </p:nvPr>
+        </p:nvSpPr>
+        <p:spPr>
+          <a:xfrm>
+            <a:off x="838200" y="365125"/>
+            <a:ext cx="10515600" cy="1325563"/>
+          </a:xfrm>
+          <a:prstGeom prst="rect">
+            <a:avLst/>
+          </a:prstGeom>
+          <a:noFill/>
+          <a:ln>
+            <a:noFill/>
+          </a:ln>
+        </p:spPr>
+        <p:txBody>
+          <a:bodyPr spcFirstLastPara="1" wrap="square" lIns="91425" tIns="45700" rIns="91425" bIns="45700" anchor="ctr" anchorCtr="0">
+            <a:normAutofit/>
+          </a:bodyPr>
+          <a:lstStyle/>
+          <a:p>
+            <a:pPr marL="0" lvl="0" indent="0" algn="l" rtl="0">
+              <a:lnSpc>
+                <a:spcPct val="90000"/>
+              </a:lnSpc>
+              <a:spcBef>
+                <a:spcPts val="0"/>
+              </a:spcBef>
+              <a:spcAft>
+                <a:spcPts val="0"/>
+              </a:spcAft>
+              <a:buClr>
+                <a:srgbClr val="704EA6"/>
+              </a:buClr>
+              <a:buSzPts val="4400"/>
+              <a:buFont typeface="Calibri"/>
+              <a:buNone/>
+            </a:pPr>
+            <a:r>
+              <a:rPr lang="en-US" sz="4400" b="1">
+                <a:solidFill>
+                  <a:srgbClr val="704EA6"/>
+                </a:solidFill>
+                <a:latin typeface="Calibri"/>
+                <a:ea typeface="Calibri"/>
+                <a:cs typeface="Calibri"/>
+                <a:sym typeface="Calibri"/>
+              </a:rPr>
+              <a:t>Impact &amp; Use case</a:t>
+            </a:r>
+            <a:endParaRPr b="1">
+              <a:solidFill>
+                <a:srgbClr val="704EA6"/>
+              </a:solidFill>
+            </a:endParaRPr>
+          </a:p>
+        </p:txBody>
+      </p:sp>
+      <p:sp>
+        <p:nvSpPr>
+          <p:cNvPr id="132" name="Google Shape;132;p7"/>
+          <p:cNvSpPr txBox="1">
+            <a:spLocks noGrp="1"/>
+          </p:cNvSpPr>
+          <p:nvPr>
+            <p:ph type="body" idx="1"/>
+          </p:nvPr>
+        </p:nvSpPr>
+        <p:spPr>
+          <a:xfrm>
+            <a:off x="469232" y="1690688"/>
+            <a:ext cx="10515600" cy="4351338"/>
+          </a:xfrm>
+          <a:prstGeom prst="rect">
+            <a:avLst/>
+          </a:prstGeom>
+          <a:noFill/>
+          <a:ln>
+            <a:noFill/>
+          </a:ln>
+        </p:spPr>
+        <p:txBody>
+          <a:bodyPr spcFirstLastPara="1" wrap="square" lIns="91425" tIns="45700" rIns="91425" bIns="45700" anchor="t" anchorCtr="0">
+            <a:normAutofit fontScale="85000" lnSpcReduction="20000"/>
+          </a:bodyPr>
+          <a:lstStyle/>
+          <a:p>
+            <a:pPr lvl="0"/>
+            <a:r>
+              <a:rPr lang="en-IN" b="1" dirty="0"/>
+              <a:t>Support time:</a:t>
+            </a:r>
+            <a:r>
+              <a:rPr lang="en-IN" dirty="0"/>
+              <a:t> about 15 min of manual triage becomes seconds, and about 2 </a:t>
+            </a:r>
+            <a:r>
+              <a:rPr lang="en-IN" dirty="0" err="1"/>
+              <a:t>ms</a:t>
+            </a:r>
+            <a:r>
+              <a:rPr lang="en-IN" dirty="0"/>
+              <a:t> on repeated issues.</a:t>
+            </a:r>
+          </a:p>
+          <a:p>
+            <a:pPr lvl="0"/>
+            <a:r>
+              <a:rPr lang="en-IN" b="1" dirty="0"/>
+              <a:t>Cost:</a:t>
+            </a:r>
+            <a:r>
+              <a:rPr lang="en-IN" dirty="0"/>
+              <a:t> a cache hit makes no LLM call and costs $0.00. Cold queries have tracked per-request cost.</a:t>
+            </a:r>
+          </a:p>
+          <a:p>
+            <a:pPr lvl="0"/>
+            <a:r>
+              <a:rPr lang="en-IN" b="1" dirty="0"/>
+              <a:t>Customer experience:</a:t>
+            </a:r>
+            <a:r>
+              <a:rPr lang="en-IN" dirty="0"/>
+              <a:t> a tappable </a:t>
+            </a:r>
+            <a:r>
+              <a:rPr lang="en-IN" dirty="0" err="1"/>
+              <a:t>deeplink</a:t>
+            </a:r>
+            <a:r>
+              <a:rPr lang="en-IN" dirty="0"/>
+              <a:t> replaces "go to Settings &gt; Display &gt; Navigation bar".</a:t>
+            </a:r>
+          </a:p>
+          <a:p>
+            <a:pPr lvl="0"/>
+            <a:r>
+              <a:rPr lang="en-IN" b="1" dirty="0"/>
+              <a:t>Safety and trust:</a:t>
+            </a:r>
+            <a:r>
+              <a:rPr lang="en-IN" dirty="0"/>
+              <a:t> no fabricated steps or links, and destructive actions always come last.</a:t>
+            </a:r>
+          </a:p>
+          <a:p>
+            <a:pPr lvl="0"/>
+            <a:r>
+              <a:rPr lang="en-IN" b="1" dirty="0"/>
+              <a:t>Use case walkthrough:</a:t>
+            </a:r>
+            <a:r>
+              <a:rPr lang="en-IN" dirty="0"/>
+              <a:t> a user reports "swipe gestures go the wrong way after installing an app". The engine returns "Follow these steps to perform this Swipe Navigation Troubleshooting", with an auto action linked to the navigation bar settings.</a:t>
+            </a:r>
+          </a:p>
+          <a:p>
+            <a:pPr lvl="0"/>
+            <a:r>
+              <a:rPr lang="en-IN" b="1" dirty="0"/>
+              <a:t>Where it plugs in:</a:t>
+            </a:r>
+            <a:r>
+              <a:rPr lang="en-IN" dirty="0"/>
+              <a:t> Bixby, the Samsung Members app and agent-assist tools.</a:t>
+            </a:r>
+          </a:p>
+        </p:txBody>
+      </p:sp>
+    </p:spTree>
+  </p:cSld>
+  <p:clrMapOvr>
+    <a:masterClrMapping/>
+  </p:clrMapOvr>
+</p:sld>
+</file>
+
+<file path=ppt/slides/slide12.xml><?xml version="1.0" encoding="utf-8"?>
+<p:sld xmlns:a="http://schemas.openxmlformats.org/drawingml/2006/main" xmlns:r="http://schemas.openxmlformats.org/officeDocument/2006/relationships" xmlns:p="http://schemas.openxmlformats.org/presentationml/2006/main">
+  <p:cSld>
+    <p:spTree>
+      <p:nvGrpSpPr>
+        <p:cNvPr id="1" name="Shape 136"/>
+        <p:cNvGrpSpPr/>
+        <p:nvPr/>
+      </p:nvGrpSpPr>
+      <p:grpSpPr>
+        <a:xfrm>
+          <a:off x="0" y="0"/>
+          <a:ext cx="0" cy="0"/>
+          <a:chOff x="0" y="0"/>
+          <a:chExt cx="0" cy="0"/>
+        </a:xfrm>
+      </p:grpSpPr>
+      <p:sp>
+        <p:nvSpPr>
+          <p:cNvPr id="137" name="Google Shape;137;p8"/>
+          <p:cNvSpPr txBox="1">
+            <a:spLocks noGrp="1"/>
+          </p:cNvSpPr>
+          <p:nvPr>
+            <p:ph type="title"/>
+          </p:nvPr>
+        </p:nvSpPr>
+        <p:spPr>
+          <a:xfrm>
+            <a:off x="838200" y="365125"/>
+            <a:ext cx="10515600" cy="1325563"/>
+          </a:xfrm>
+          <a:prstGeom prst="rect">
+            <a:avLst/>
+          </a:prstGeom>
+          <a:noFill/>
+          <a:ln>
+            <a:noFill/>
+          </a:ln>
+        </p:spPr>
+        <p:txBody>
+          <a:bodyPr spcFirstLastPara="1" wrap="square" lIns="91425" tIns="45700" rIns="91425" bIns="45700" anchor="ctr" anchorCtr="0">
+            <a:normAutofit/>
+          </a:bodyPr>
+          <a:lstStyle/>
+          <a:p>
+            <a:pPr marL="0" lvl="0" indent="0" algn="l" rtl="0">
+              <a:lnSpc>
+                <a:spcPct val="90000"/>
+              </a:lnSpc>
+              <a:spcBef>
+                <a:spcPts val="0"/>
+              </a:spcBef>
+              <a:spcAft>
+                <a:spcPts val="0"/>
+              </a:spcAft>
+              <a:buClr>
+                <a:srgbClr val="704EA6"/>
+              </a:buClr>
+              <a:buSzPts val="4400"/>
+              <a:buFont typeface="Calibri"/>
+              <a:buNone/>
+            </a:pPr>
+            <a:r>
+              <a:rPr lang="en-US" sz="4400" b="1">
+                <a:solidFill>
+                  <a:srgbClr val="704EA6"/>
+                </a:solidFill>
+                <a:latin typeface="Calibri"/>
+                <a:ea typeface="Calibri"/>
+                <a:cs typeface="Calibri"/>
+                <a:sym typeface="Calibri"/>
+              </a:rPr>
+              <a:t>Innovation highlights, results and limitations</a:t>
+            </a:r>
+            <a:endParaRPr sz="4400" b="1">
+              <a:solidFill>
+                <a:srgbClr val="704EA6"/>
+              </a:solidFill>
+            </a:endParaRPr>
+          </a:p>
+        </p:txBody>
+      </p:sp>
+      <p:sp>
+        <p:nvSpPr>
+          <p:cNvPr id="138" name="Google Shape;138;p8"/>
+          <p:cNvSpPr txBox="1">
+            <a:spLocks noGrp="1"/>
+          </p:cNvSpPr>
+          <p:nvPr>
+            <p:ph type="body" idx="1"/>
+          </p:nvPr>
+        </p:nvSpPr>
+        <p:spPr>
+          <a:xfrm>
+            <a:off x="838200" y="1825625"/>
+            <a:ext cx="10515600" cy="4351338"/>
+          </a:xfrm>
+          <a:prstGeom prst="rect">
+            <a:avLst/>
+          </a:prstGeom>
+          <a:noFill/>
+          <a:ln>
+            <a:noFill/>
+          </a:ln>
+        </p:spPr>
+        <p:txBody>
+          <a:bodyPr spcFirstLastPara="1" wrap="square" lIns="91425" tIns="45700" rIns="91425" bIns="45700" anchor="t" anchorCtr="0">
+            <a:normAutofit fontScale="47500" lnSpcReduction="20000"/>
+          </a:bodyPr>
+          <a:lstStyle/>
+          <a:p>
+            <a:r>
+              <a:rPr lang="en-IN" b="1" dirty="0"/>
+              <a:t>What Makes Our Solution Different?</a:t>
+            </a:r>
+          </a:p>
+          <a:p>
+            <a:r>
+              <a:rPr lang="en-IN" b="1" dirty="0"/>
+              <a:t>1. Multi-register understanding</a:t>
+            </a:r>
+          </a:p>
+          <a:p>
+            <a:r>
+              <a:rPr lang="en-IN" dirty="0"/>
+              <a:t>Formal + casual + keyword + frustrated + typo.</a:t>
+            </a:r>
+          </a:p>
+          <a:p>
+            <a:r>
+              <a:rPr lang="en-IN" b="1" dirty="0"/>
+              <a:t>2. 32-category symptom intelligence</a:t>
+            </a:r>
+          </a:p>
+          <a:p>
+            <a:r>
+              <a:rPr lang="en-IN" dirty="0"/>
+              <a:t>The taxonomy extends beyond only screen problems.</a:t>
+            </a:r>
+          </a:p>
+          <a:p>
+            <a:r>
+              <a:rPr lang="en-IN" b="1" dirty="0"/>
+              <a:t>3. Deterministic + Generative AI</a:t>
+            </a:r>
+          </a:p>
+          <a:p>
+            <a:r>
+              <a:rPr lang="en-IN" dirty="0"/>
+              <a:t>Rules handle known patterns while LLMs provide controlled fallback and enrichment.</a:t>
+            </a:r>
+          </a:p>
+          <a:p>
+            <a:r>
+              <a:rPr lang="en-IN" b="1" dirty="0"/>
+              <a:t>4. Semantic </a:t>
+            </a:r>
+            <a:r>
+              <a:rPr lang="en-IN" b="1" dirty="0" err="1"/>
+              <a:t>deeplink</a:t>
+            </a:r>
+            <a:r>
+              <a:rPr lang="en-IN" b="1" dirty="0"/>
+              <a:t> mapping</a:t>
+            </a:r>
+          </a:p>
+          <a:p>
+            <a:r>
+              <a:rPr lang="en-IN" dirty="0"/>
+              <a:t>Connects natural-language actions to device operations.</a:t>
+            </a:r>
+          </a:p>
+          <a:p>
+            <a:r>
+              <a:rPr lang="en-IN" b="1" dirty="0"/>
+              <a:t>5. Device-aware semantic cache</a:t>
+            </a:r>
+          </a:p>
+          <a:p>
+            <a:r>
+              <a:rPr lang="en-IN" dirty="0"/>
+              <a:t>Similar queries are matched while maintaining device isolation.</a:t>
+            </a:r>
+          </a:p>
+          <a:p>
+            <a:r>
+              <a:rPr lang="en-IN" b="1" dirty="0"/>
+              <a:t>6. Grounded response generation</a:t>
+            </a:r>
+          </a:p>
+          <a:p>
+            <a:r>
+              <a:rPr lang="en-IN" dirty="0"/>
+              <a:t>Troubleshooting actions are derived from the supplied troubleshooting knowledge.</a:t>
+            </a:r>
+          </a:p>
+          <a:p>
+            <a:r>
+              <a:rPr lang="en-IN" b="1" dirty="0"/>
+              <a:t>7. Zero-URL-leak protection</a:t>
+            </a:r>
+          </a:p>
+          <a:p>
+            <a:r>
+              <a:rPr lang="en-IN" dirty="0"/>
+              <a:t>Prevents unwanted URLs from leaking into the final response.</a:t>
+            </a:r>
+          </a:p>
+        </p:txBody>
+      </p:sp>
+    </p:spTree>
+  </p:cSld>
+  <p:clrMapOvr>
+    <a:masterClrMapping/>
+  </p:clrMapOvr>
+</p:sld>
+</file>
+
+<file path=ppt/slides/slide13.xml><?xml version="1.0" encoding="utf-8"?>
+<p:sld xmlns:a="http://schemas.openxmlformats.org/drawingml/2006/main" xmlns:r="http://schemas.openxmlformats.org/officeDocument/2006/relationships" xmlns:p="http://schemas.openxmlformats.org/presentationml/2006/main">
+  <p:cSld>
+    <p:spTree>
+      <p:nvGrpSpPr>
         <p:cNvPr id="1" name="Shape 142"/>
         <p:cNvGrpSpPr/>
         <p:nvPr/>
@@ -13835,7 +14516,7 @@
 </p:sld>
 </file>
 
-<file path=ppt/slides/slide11.xml><?xml version="1.0" encoding="utf-8"?>
+<file path=ppt/slides/slide14.xml><?xml version="1.0" encoding="utf-8"?>
 <p:sld xmlns:a="http://schemas.openxmlformats.org/drawingml/2006/main" xmlns:r="http://schemas.openxmlformats.org/officeDocument/2006/relationships" xmlns:p="http://schemas.openxmlformats.org/presentationml/2006/main">
   <p:cSld>
     <p:spTree>
@@ -13998,7 +14679,7 @@
 </p:sld>
 </file>
 
-<file path=ppt/slides/slide12.xml><?xml version="1.0" encoding="utf-8"?>
+<file path=ppt/slides/slide15.xml><?xml version="1.0" encoding="utf-8"?>
 <p:sld xmlns:a="http://schemas.openxmlformats.org/drawingml/2006/main" xmlns:r="http://schemas.openxmlformats.org/officeDocument/2006/relationships" xmlns:p="http://schemas.openxmlformats.org/presentationml/2006/main">
   <p:cSld>
     <p:spTree>
@@ -14258,7 +14939,7 @@
 </p:sld>
 </file>
 
-<file path=ppt/slides/slide13.xml><?xml version="1.0" encoding="utf-8"?>
+<file path=ppt/slides/slide16.xml><?xml version="1.0" encoding="utf-8"?>
 <p:sld xmlns:a="http://schemas.openxmlformats.org/drawingml/2006/main" xmlns:r="http://schemas.openxmlformats.org/officeDocument/2006/relationships" xmlns:p="http://schemas.openxmlformats.org/presentationml/2006/main">
   <p:cSld>
     <p:spTree>
@@ -15807,8 +16488,8 @@
         </p:nvSpPr>
         <p:spPr>
           <a:xfrm>
-            <a:off x="838200" y="365125"/>
-            <a:ext cx="10515600" cy="1325563"/>
+            <a:off x="348343" y="539296"/>
+            <a:ext cx="11288486" cy="1325563"/>
           </a:xfrm>
           <a:prstGeom prst="rect">
             <a:avLst/>
@@ -15824,25 +16505,14 @@
           </a:bodyPr>
           <a:lstStyle/>
           <a:p>
-            <a:pPr marL="0" lvl="0" indent="0" algn="l" rtl="0">
-              <a:lnSpc>
-                <a:spcPct val="90000"/>
-              </a:lnSpc>
-              <a:spcBef>
-                <a:spcPts val="0"/>
-              </a:spcBef>
-              <a:spcAft>
-                <a:spcPts val="0"/>
-              </a:spcAft>
+            <a:pPr lvl="0">
               <a:buClr>
                 <a:srgbClr val="704EA6"/>
               </a:buClr>
               <a:buSzPts val="4400"/>
-              <a:buFont typeface="Calibri"/>
-              <a:buNone/>
             </a:pPr>
             <a:r>
-              <a:rPr lang="en-US" b="1">
+              <a:rPr lang="en-US" b="1" dirty="0">
                 <a:solidFill>
                   <a:srgbClr val="704EA6"/>
                 </a:solidFill>
@@ -15853,7 +16523,32 @@
               </a:rPr>
               <a:t>Demo &amp; Product Walkthrough</a:t>
             </a:r>
-            <a:endParaRPr/>
+            <a:r>
+              <a:rPr lang="en-US" b="1" dirty="0">
+                <a:solidFill>
+                  <a:srgbClr val="704EA6"/>
+                </a:solidFill>
+              </a:rPr>
+              <a:t> - </a:t>
+            </a:r>
+            <a:r>
+              <a:rPr lang="en-US" sz="2200" b="1" dirty="0">
+                <a:solidFill>
+                  <a:srgbClr val="704EA6"/>
+                </a:solidFill>
+                <a:hlinkClick r:id="rId3"/>
+              </a:rPr>
+              <a:t>https://drive.google.com/file/d/1_ooCOpjRS2G8lOtwKyPkBSGQNYcRL5gH/view?usp=sharing</a:t>
+            </a:r>
+            <a:r>
+              <a:rPr lang="en-US" sz="2200" b="1" dirty="0">
+                <a:solidFill>
+                  <a:srgbClr val="704EA6"/>
+                </a:solidFill>
+              </a:rPr>
+              <a:t> </a:t>
+            </a:r>
+            <a:endParaRPr sz="2200" dirty="0"/>
           </a:p>
         </p:txBody>
       </p:sp>
@@ -15869,7 +16564,7 @@
         </p:nvSpPr>
         <p:spPr>
           <a:xfrm>
-            <a:off x="389021" y="1552909"/>
+            <a:off x="247508" y="2147434"/>
             <a:ext cx="10515600" cy="4351338"/>
           </a:xfrm>
           <a:prstGeom prst="rect">
@@ -16041,7 +16736,7 @@
   <p:cSld>
     <p:spTree>
       <p:nvGrpSpPr>
-        <p:cNvPr id="1" name="Shape 124"/>
+        <p:cNvPr id="1" name=""/>
         <p:cNvGrpSpPr/>
         <p:nvPr/>
       </p:nvGrpSpPr>
@@ -16053,238 +16748,42 @@
           <a:chExt cx="0" cy="0"/>
         </a:xfrm>
       </p:grpSpPr>
-      <p:sp>
-        <p:nvSpPr>
-          <p:cNvPr id="125" name="Google Shape;125;p6"/>
-          <p:cNvSpPr txBox="1">
-            <a:spLocks noGrp="1"/>
-          </p:cNvSpPr>
-          <p:nvPr>
-            <p:ph type="title"/>
-          </p:nvPr>
-        </p:nvSpPr>
+      <p:pic>
+        <p:nvPicPr>
+          <p:cNvPr id="3" name="Picture 2">
+            <a:extLst>
+              <a:ext uri="{FF2B5EF4-FFF2-40B4-BE49-F238E27FC236}">
+                <a16:creationId xmlns:a16="http://schemas.microsoft.com/office/drawing/2014/main" id="{3082ECC0-07BC-433D-362E-A3C7AEFD94B1}"/>
+              </a:ext>
+            </a:extLst>
+          </p:cNvPr>
+          <p:cNvPicPr>
+            <a:picLocks noChangeAspect="1"/>
+          </p:cNvPicPr>
+          <p:nvPr/>
+        </p:nvPicPr>
+        <p:blipFill>
+          <a:blip r:embed="rId2"/>
+          <a:stretch>
+            <a:fillRect/>
+          </a:stretch>
+        </p:blipFill>
         <p:spPr>
           <a:xfrm>
-            <a:off x="838200" y="365125"/>
-            <a:ext cx="10515600" cy="1325563"/>
+            <a:off x="1077687" y="136487"/>
+            <a:ext cx="9765458" cy="6324660"/>
           </a:xfrm>
           <a:prstGeom prst="rect">
             <a:avLst/>
           </a:prstGeom>
-          <a:noFill/>
-          <a:ln>
-            <a:noFill/>
-          </a:ln>
         </p:spPr>
-        <p:txBody>
-          <a:bodyPr spcFirstLastPara="1" wrap="square" lIns="91425" tIns="45700" rIns="91425" bIns="45700" anchor="ctr" anchorCtr="0">
-            <a:normAutofit/>
-          </a:bodyPr>
-          <a:lstStyle/>
-          <a:p>
-            <a:pPr marL="0" lvl="0" indent="0" algn="l" rtl="0">
-              <a:lnSpc>
-                <a:spcPct val="90000"/>
-              </a:lnSpc>
-              <a:spcBef>
-                <a:spcPts val="0"/>
-              </a:spcBef>
-              <a:spcAft>
-                <a:spcPts val="0"/>
-              </a:spcAft>
-              <a:buClr>
-                <a:srgbClr val="704EA6"/>
-              </a:buClr>
-              <a:buSzPts val="4400"/>
-              <a:buFont typeface="Calibri"/>
-              <a:buNone/>
-            </a:pPr>
-            <a:r>
-              <a:rPr lang="en-US" sz="4400" b="1" dirty="0">
-                <a:solidFill>
-                  <a:srgbClr val="704EA6"/>
-                </a:solidFill>
-                <a:latin typeface="Calibri"/>
-                <a:ea typeface="Calibri"/>
-                <a:cs typeface="Calibri"/>
-                <a:sym typeface="Calibri"/>
-              </a:rPr>
-              <a:t>Tools and tech stack used</a:t>
-            </a:r>
-            <a:endParaRPr b="1" dirty="0">
-              <a:solidFill>
-                <a:srgbClr val="704EA6"/>
-              </a:solidFill>
-            </a:endParaRPr>
-          </a:p>
-        </p:txBody>
-      </p:sp>
-      <p:sp>
-        <p:nvSpPr>
-          <p:cNvPr id="126" name="Google Shape;126;p6"/>
-          <p:cNvSpPr txBox="1">
-            <a:spLocks noGrp="1"/>
-          </p:cNvSpPr>
-          <p:nvPr>
-            <p:ph type="body" idx="1"/>
-          </p:nvPr>
-        </p:nvSpPr>
-        <p:spPr>
-          <a:xfrm>
-            <a:off x="272716" y="1858252"/>
-            <a:ext cx="11646568" cy="4351338"/>
-          </a:xfrm>
-          <a:prstGeom prst="rect">
-            <a:avLst/>
-          </a:prstGeom>
-          <a:noFill/>
-          <a:ln>
-            <a:noFill/>
-          </a:ln>
-        </p:spPr>
-        <p:txBody>
-          <a:bodyPr spcFirstLastPara="1" wrap="square" lIns="91425" tIns="45700" rIns="91425" bIns="45700" anchor="t" anchorCtr="0">
-            <a:normAutofit fontScale="85000" lnSpcReduction="20000"/>
-          </a:bodyPr>
-          <a:lstStyle/>
-          <a:p>
-            <a:pPr lvl="0"/>
-            <a:r>
-              <a:rPr lang="en-IN" b="1" dirty="0"/>
-              <a:t>Language and API:</a:t>
-            </a:r>
-            <a:r>
-              <a:rPr lang="en-IN" dirty="0"/>
-              <a:t> Python 3.11, </a:t>
-            </a:r>
-            <a:r>
-              <a:rPr lang="en-IN" dirty="0" err="1"/>
-              <a:t>FastAPI</a:t>
-            </a:r>
-            <a:r>
-              <a:rPr lang="en-IN" dirty="0"/>
-              <a:t>, </a:t>
-            </a:r>
-            <a:r>
-              <a:rPr lang="en-IN" dirty="0" err="1"/>
-              <a:t>Uvicorn</a:t>
-            </a:r>
-            <a:r>
-              <a:rPr lang="en-IN" dirty="0"/>
-              <a:t>, </a:t>
-            </a:r>
-            <a:r>
-              <a:rPr lang="en-IN" dirty="0" err="1"/>
-              <a:t>Pydantic</a:t>
-            </a:r>
-            <a:r>
-              <a:rPr lang="en-IN" dirty="0"/>
-              <a:t> (the official schema.py contract)</a:t>
-            </a:r>
-          </a:p>
-          <a:p>
-            <a:pPr lvl="0"/>
-            <a:r>
-              <a:rPr lang="en-IN" b="1" dirty="0"/>
-              <a:t>LLM:</a:t>
-            </a:r>
-            <a:r>
-              <a:rPr lang="en-IN" dirty="0"/>
-              <a:t> Gemini (gemini-3.5-flash-lite) via a pluggable client. OpenAI, Anthropic and an offline mock are also supported. temperature=0, response </a:t>
-            </a:r>
-            <a:r>
-              <a:rPr lang="en-IN" dirty="0" err="1"/>
-              <a:t>memoization</a:t>
-            </a:r>
-            <a:r>
-              <a:rPr lang="en-IN" dirty="0"/>
-              <a:t>, 30 s timeout guard, per-request token cost tracking.</a:t>
-            </a:r>
-          </a:p>
-          <a:p>
-            <a:pPr lvl="0"/>
-            <a:r>
-              <a:rPr lang="en-IN" b="1" dirty="0"/>
-              <a:t>Retrieval and embeddings:</a:t>
-            </a:r>
-            <a:r>
-              <a:rPr lang="en-IN" dirty="0"/>
-              <a:t> scikit-learn char n-gram TF-IDF (3–5, </a:t>
-            </a:r>
-            <a:r>
-              <a:rPr lang="en-IN" dirty="0" err="1"/>
-              <a:t>char_wb</a:t>
-            </a:r>
-            <a:r>
-              <a:rPr lang="en-IN" dirty="0"/>
-              <a:t>) with cosine similarity over sparse matrices (SciPy and NumPy). This was chosen because </a:t>
-            </a:r>
-            <a:r>
-              <a:rPr lang="en-IN" dirty="0" err="1"/>
-              <a:t>HuggingFace</a:t>
-            </a:r>
-            <a:r>
-              <a:rPr lang="en-IN" dirty="0"/>
-              <a:t> was blocked on our network. Fully offline, typo-tolerant, and the Embedder protocol lets a dense model drop in later.</a:t>
-            </a:r>
-          </a:p>
-          <a:p>
-            <a:pPr lvl="0"/>
-            <a:r>
-              <a:rPr lang="en-IN" b="1" dirty="0"/>
-              <a:t>Cache:</a:t>
-            </a:r>
-            <a:r>
-              <a:rPr lang="en-IN" dirty="0"/>
-              <a:t> in-memory semantic cache, device-gated, thread-safe, pre-warmed from </a:t>
-            </a:r>
-            <a:r>
-              <a:rPr lang="en-IN" dirty="0" err="1"/>
-              <a:t>results.jsonl</a:t>
-            </a:r>
-            <a:endParaRPr lang="en-IN" dirty="0"/>
-          </a:p>
-          <a:p>
-            <a:pPr lvl="0"/>
-            <a:r>
-              <a:rPr lang="en-IN" b="1" dirty="0"/>
-              <a:t>Quality:</a:t>
-            </a:r>
-            <a:r>
-              <a:rPr lang="en-IN" dirty="0"/>
-              <a:t> </a:t>
-            </a:r>
-            <a:r>
-              <a:rPr lang="en-IN" dirty="0" err="1"/>
-              <a:t>pytest</a:t>
-            </a:r>
-            <a:r>
-              <a:rPr lang="en-IN" dirty="0"/>
-              <a:t> (119 test functions), validation scripts, benchmark scripts</a:t>
-            </a:r>
-          </a:p>
-          <a:p>
-            <a:pPr lvl="0"/>
-            <a:r>
-              <a:rPr lang="en-IN" b="1" dirty="0"/>
-              <a:t>Deploy:</a:t>
-            </a:r>
-            <a:r>
-              <a:rPr lang="en-IN" dirty="0"/>
-              <a:t> Docker (python:3.11-slim, </a:t>
-            </a:r>
-            <a:r>
-              <a:rPr lang="en-IN" dirty="0" err="1"/>
-              <a:t>healthcheck</a:t>
-            </a:r>
-            <a:r>
-              <a:rPr lang="en-IN" dirty="0"/>
-              <a:t>, vectorizer built at image build time)</a:t>
-            </a:r>
-          </a:p>
-        </p:txBody>
-      </p:sp>
+      </p:pic>
     </p:spTree>
+    <p:extLst>
+      <p:ext uri="{BB962C8B-B14F-4D97-AF65-F5344CB8AC3E}">
+        <p14:creationId xmlns:p14="http://schemas.microsoft.com/office/powerpoint/2010/main" val="814562217"/>
+      </p:ext>
+    </p:extLst>
   </p:cSld>
   <p:clrMapOvr>
     <a:masterClrMapping/>
@@ -16297,7 +16796,7 @@
   <p:cSld>
     <p:spTree>
       <p:nvGrpSpPr>
-        <p:cNvPr id="1" name="Shape 130"/>
+        <p:cNvPr id="1" name=""/>
         <p:cNvGrpSpPr/>
         <p:nvPr/>
       </p:nvGrpSpPr>
@@ -16309,185 +16808,42 @@
           <a:chExt cx="0" cy="0"/>
         </a:xfrm>
       </p:grpSpPr>
-      <p:sp>
-        <p:nvSpPr>
-          <p:cNvPr id="131" name="Google Shape;131;p7"/>
-          <p:cNvSpPr txBox="1">
-            <a:spLocks noGrp="1"/>
-          </p:cNvSpPr>
-          <p:nvPr>
-            <p:ph type="title"/>
-          </p:nvPr>
-        </p:nvSpPr>
+      <p:pic>
+        <p:nvPicPr>
+          <p:cNvPr id="3" name="Picture 2">
+            <a:extLst>
+              <a:ext uri="{FF2B5EF4-FFF2-40B4-BE49-F238E27FC236}">
+                <a16:creationId xmlns:a16="http://schemas.microsoft.com/office/drawing/2014/main" id="{55505544-E94D-73A2-4682-CE60C1B67859}"/>
+              </a:ext>
+            </a:extLst>
+          </p:cNvPr>
+          <p:cNvPicPr>
+            <a:picLocks noChangeAspect="1"/>
+          </p:cNvPicPr>
+          <p:nvPr/>
+        </p:nvPicPr>
+        <p:blipFill>
+          <a:blip r:embed="rId2"/>
+          <a:stretch>
+            <a:fillRect/>
+          </a:stretch>
+        </p:blipFill>
         <p:spPr>
           <a:xfrm>
-            <a:off x="838200" y="365125"/>
-            <a:ext cx="10515600" cy="1325563"/>
+            <a:off x="261081" y="1616528"/>
+            <a:ext cx="11669837" cy="3624943"/>
           </a:xfrm>
           <a:prstGeom prst="rect">
             <a:avLst/>
           </a:prstGeom>
-          <a:noFill/>
-          <a:ln>
-            <a:noFill/>
-          </a:ln>
         </p:spPr>
-        <p:txBody>
-          <a:bodyPr spcFirstLastPara="1" wrap="square" lIns="91425" tIns="45700" rIns="91425" bIns="45700" anchor="ctr" anchorCtr="0">
-            <a:normAutofit/>
-          </a:bodyPr>
-          <a:lstStyle/>
-          <a:p>
-            <a:pPr marL="0" lvl="0" indent="0" algn="l" rtl="0">
-              <a:lnSpc>
-                <a:spcPct val="90000"/>
-              </a:lnSpc>
-              <a:spcBef>
-                <a:spcPts val="0"/>
-              </a:spcBef>
-              <a:spcAft>
-                <a:spcPts val="0"/>
-              </a:spcAft>
-              <a:buClr>
-                <a:srgbClr val="704EA6"/>
-              </a:buClr>
-              <a:buSzPts val="4400"/>
-              <a:buFont typeface="Calibri"/>
-              <a:buNone/>
-            </a:pPr>
-            <a:r>
-              <a:rPr lang="en-US" sz="4400" b="1">
-                <a:solidFill>
-                  <a:srgbClr val="704EA6"/>
-                </a:solidFill>
-                <a:latin typeface="Calibri"/>
-                <a:ea typeface="Calibri"/>
-                <a:cs typeface="Calibri"/>
-                <a:sym typeface="Calibri"/>
-              </a:rPr>
-              <a:t>Impact &amp; Use case</a:t>
-            </a:r>
-            <a:endParaRPr b="1">
-              <a:solidFill>
-                <a:srgbClr val="704EA6"/>
-              </a:solidFill>
-            </a:endParaRPr>
-          </a:p>
-        </p:txBody>
-      </p:sp>
-      <p:sp>
-        <p:nvSpPr>
-          <p:cNvPr id="132" name="Google Shape;132;p7"/>
-          <p:cNvSpPr txBox="1">
-            <a:spLocks noGrp="1"/>
-          </p:cNvSpPr>
-          <p:nvPr>
-            <p:ph type="body" idx="1"/>
-          </p:nvPr>
-        </p:nvSpPr>
-        <p:spPr>
-          <a:xfrm>
-            <a:off x="469232" y="1690688"/>
-            <a:ext cx="10515600" cy="4351338"/>
-          </a:xfrm>
-          <a:prstGeom prst="rect">
-            <a:avLst/>
-          </a:prstGeom>
-          <a:noFill/>
-          <a:ln>
-            <a:noFill/>
-          </a:ln>
-        </p:spPr>
-        <p:txBody>
-          <a:bodyPr spcFirstLastPara="1" wrap="square" lIns="91425" tIns="45700" rIns="91425" bIns="45700" anchor="t" anchorCtr="0">
-            <a:normAutofit fontScale="85000" lnSpcReduction="20000"/>
-          </a:bodyPr>
-          <a:lstStyle/>
-          <a:p>
-            <a:pPr lvl="0"/>
-            <a:r>
-              <a:rPr lang="en-IN" b="1" dirty="0"/>
-              <a:t>Support time:</a:t>
-            </a:r>
-            <a:r>
-              <a:rPr lang="en-IN" dirty="0"/>
-              <a:t> about 15 min of manual triage becomes seconds, and about 2 </a:t>
-            </a:r>
-            <a:r>
-              <a:rPr lang="en-IN" dirty="0" err="1"/>
-              <a:t>ms</a:t>
-            </a:r>
-            <a:r>
-              <a:rPr lang="en-IN" dirty="0"/>
-              <a:t> on repeated issues.</a:t>
-            </a:r>
-          </a:p>
-          <a:p>
-            <a:pPr lvl="0"/>
-            <a:r>
-              <a:rPr lang="en-IN" b="1" dirty="0"/>
-              <a:t>Cost:</a:t>
-            </a:r>
-            <a:r>
-              <a:rPr lang="en-IN" dirty="0"/>
-              <a:t> a cache hit makes no LLM call and costs $0.00. Cold queries have tracked per-request cost.</a:t>
-            </a:r>
-          </a:p>
-          <a:p>
-            <a:pPr lvl="0"/>
-            <a:r>
-              <a:rPr lang="en-IN" b="1" dirty="0"/>
-              <a:t>Customer experience:</a:t>
-            </a:r>
-            <a:r>
-              <a:rPr lang="en-IN" dirty="0"/>
-              <a:t> a tappable </a:t>
-            </a:r>
-            <a:r>
-              <a:rPr lang="en-IN" dirty="0" err="1"/>
-              <a:t>deeplink</a:t>
-            </a:r>
-            <a:r>
-              <a:rPr lang="en-IN" dirty="0"/>
-              <a:t> replaces "go to Settings &gt; Display &gt; Navigation bar".</a:t>
-            </a:r>
-          </a:p>
-          <a:p>
-            <a:pPr lvl="0"/>
-            <a:r>
-              <a:rPr lang="en-IN" b="1" dirty="0"/>
-              <a:t>Safety and trust:</a:t>
-            </a:r>
-            <a:r>
-              <a:rPr lang="en-IN" dirty="0"/>
-              <a:t> no fabricated steps or links, and destructive actions always come last.</a:t>
-            </a:r>
-          </a:p>
-          <a:p>
-            <a:pPr lvl="0"/>
-            <a:r>
-              <a:rPr lang="en-IN" b="1" dirty="0"/>
-              <a:t>Use case walkthrough:</a:t>
-            </a:r>
-            <a:r>
-              <a:rPr lang="en-IN" dirty="0"/>
-              <a:t> a user reports "swipe gestures go the wrong way after installing an app". The engine returns "Follow these steps to perform this Swipe Navigation Troubleshooting", with an auto action linked to the navigation bar settings.</a:t>
-            </a:r>
-          </a:p>
-          <a:p>
-            <a:pPr lvl="0"/>
-            <a:r>
-              <a:rPr lang="en-IN" b="1" dirty="0"/>
-              <a:t>Where it plugs in:</a:t>
-            </a:r>
-            <a:r>
-              <a:rPr lang="en-IN" dirty="0"/>
-              <a:t> Bixby, the Samsung Members app and agent-assist tools.</a:t>
-            </a:r>
-          </a:p>
-        </p:txBody>
-      </p:sp>
+      </p:pic>
     </p:spTree>
+    <p:extLst>
+      <p:ext uri="{BB962C8B-B14F-4D97-AF65-F5344CB8AC3E}">
+        <p14:creationId xmlns:p14="http://schemas.microsoft.com/office/powerpoint/2010/main" val="1214640714"/>
+      </p:ext>
+    </p:extLst>
   </p:cSld>
   <p:clrMapOvr>
     <a:masterClrMapping/>
@@ -16500,7 +16856,7 @@
   <p:cSld>
     <p:spTree>
       <p:nvGrpSpPr>
-        <p:cNvPr id="1" name="Shape 136"/>
+        <p:cNvPr id="1" name=""/>
         <p:cNvGrpSpPr/>
         <p:nvPr/>
       </p:nvGrpSpPr>
@@ -16512,201 +16868,42 @@
           <a:chExt cx="0" cy="0"/>
         </a:xfrm>
       </p:grpSpPr>
-      <p:sp>
-        <p:nvSpPr>
-          <p:cNvPr id="137" name="Google Shape;137;p8"/>
-          <p:cNvSpPr txBox="1">
-            <a:spLocks noGrp="1"/>
-          </p:cNvSpPr>
-          <p:nvPr>
-            <p:ph type="title"/>
-          </p:nvPr>
-        </p:nvSpPr>
+      <p:pic>
+        <p:nvPicPr>
+          <p:cNvPr id="3" name="Picture 2">
+            <a:extLst>
+              <a:ext uri="{FF2B5EF4-FFF2-40B4-BE49-F238E27FC236}">
+                <a16:creationId xmlns:a16="http://schemas.microsoft.com/office/drawing/2014/main" id="{E4AE5199-E856-6C0C-F612-FB149455DC10}"/>
+              </a:ext>
+            </a:extLst>
+          </p:cNvPr>
+          <p:cNvPicPr>
+            <a:picLocks noChangeAspect="1"/>
+          </p:cNvPicPr>
+          <p:nvPr/>
+        </p:nvPicPr>
+        <p:blipFill>
+          <a:blip r:embed="rId2"/>
+          <a:stretch>
+            <a:fillRect/>
+          </a:stretch>
+        </p:blipFill>
         <p:spPr>
           <a:xfrm>
-            <a:off x="838200" y="365125"/>
-            <a:ext cx="10515600" cy="1325563"/>
+            <a:off x="1146434" y="103640"/>
+            <a:ext cx="9899132" cy="6411234"/>
           </a:xfrm>
           <a:prstGeom prst="rect">
             <a:avLst/>
           </a:prstGeom>
-          <a:noFill/>
-          <a:ln>
-            <a:noFill/>
-          </a:ln>
         </p:spPr>
-        <p:txBody>
-          <a:bodyPr spcFirstLastPara="1" wrap="square" lIns="91425" tIns="45700" rIns="91425" bIns="45700" anchor="ctr" anchorCtr="0">
-            <a:normAutofit/>
-          </a:bodyPr>
-          <a:lstStyle/>
-          <a:p>
-            <a:pPr marL="0" lvl="0" indent="0" algn="l" rtl="0">
-              <a:lnSpc>
-                <a:spcPct val="90000"/>
-              </a:lnSpc>
-              <a:spcBef>
-                <a:spcPts val="0"/>
-              </a:spcBef>
-              <a:spcAft>
-                <a:spcPts val="0"/>
-              </a:spcAft>
-              <a:buClr>
-                <a:srgbClr val="704EA6"/>
-              </a:buClr>
-              <a:buSzPts val="4400"/>
-              <a:buFont typeface="Calibri"/>
-              <a:buNone/>
-            </a:pPr>
-            <a:r>
-              <a:rPr lang="en-US" sz="4400" b="1">
-                <a:solidFill>
-                  <a:srgbClr val="704EA6"/>
-                </a:solidFill>
-                <a:latin typeface="Calibri"/>
-                <a:ea typeface="Calibri"/>
-                <a:cs typeface="Calibri"/>
-                <a:sym typeface="Calibri"/>
-              </a:rPr>
-              <a:t>Innovation highlights, results and limitations</a:t>
-            </a:r>
-            <a:endParaRPr sz="4400" b="1">
-              <a:solidFill>
-                <a:srgbClr val="704EA6"/>
-              </a:solidFill>
-            </a:endParaRPr>
-          </a:p>
-        </p:txBody>
-      </p:sp>
-      <p:sp>
-        <p:nvSpPr>
-          <p:cNvPr id="138" name="Google Shape;138;p8"/>
-          <p:cNvSpPr txBox="1">
-            <a:spLocks noGrp="1"/>
-          </p:cNvSpPr>
-          <p:nvPr>
-            <p:ph type="body" idx="1"/>
-          </p:nvPr>
-        </p:nvSpPr>
-        <p:spPr>
-          <a:xfrm>
-            <a:off x="838200" y="1825625"/>
-            <a:ext cx="10515600" cy="4351338"/>
-          </a:xfrm>
-          <a:prstGeom prst="rect">
-            <a:avLst/>
-          </a:prstGeom>
-          <a:noFill/>
-          <a:ln>
-            <a:noFill/>
-          </a:ln>
-        </p:spPr>
-        <p:txBody>
-          <a:bodyPr spcFirstLastPara="1" wrap="square" lIns="91425" tIns="45700" rIns="91425" bIns="45700" anchor="t" anchorCtr="0">
-            <a:normAutofit fontScale="47500" lnSpcReduction="20000"/>
-          </a:bodyPr>
-          <a:lstStyle/>
-          <a:p>
-            <a:r>
-              <a:rPr lang="en-IN" b="1" dirty="0"/>
-              <a:t>What Makes Our Solution Different?</a:t>
-            </a:r>
-          </a:p>
-          <a:p>
-            <a:r>
-              <a:rPr lang="en-IN" b="1" dirty="0"/>
-              <a:t>1. Multi-register understanding</a:t>
-            </a:r>
-          </a:p>
-          <a:p>
-            <a:r>
-              <a:rPr lang="en-IN" dirty="0"/>
-              <a:t>Formal + casual + keyword + frustrated + typo.</a:t>
-            </a:r>
-          </a:p>
-          <a:p>
-            <a:r>
-              <a:rPr lang="en-IN" b="1" dirty="0"/>
-              <a:t>2. 32-category symptom intelligence</a:t>
-            </a:r>
-          </a:p>
-          <a:p>
-            <a:r>
-              <a:rPr lang="en-IN" dirty="0"/>
-              <a:t>The taxonomy extends beyond only screen problems.</a:t>
-            </a:r>
-          </a:p>
-          <a:p>
-            <a:r>
-              <a:rPr lang="en-IN" b="1" dirty="0"/>
-              <a:t>3. Deterministic + Generative AI</a:t>
-            </a:r>
-          </a:p>
-          <a:p>
-            <a:r>
-              <a:rPr lang="en-IN" dirty="0"/>
-              <a:t>Rules handle known patterns while LLMs provide controlled fallback and enrichment.</a:t>
-            </a:r>
-          </a:p>
-          <a:p>
-            <a:r>
-              <a:rPr lang="en-IN" b="1" dirty="0"/>
-              <a:t>4. Semantic </a:t>
-            </a:r>
-            <a:r>
-              <a:rPr lang="en-IN" b="1" dirty="0" err="1"/>
-              <a:t>deeplink</a:t>
-            </a:r>
-            <a:r>
-              <a:rPr lang="en-IN" b="1" dirty="0"/>
-              <a:t> mapping</a:t>
-            </a:r>
-          </a:p>
-          <a:p>
-            <a:r>
-              <a:rPr lang="en-IN" dirty="0"/>
-              <a:t>Connects natural-language actions to device operations.</a:t>
-            </a:r>
-          </a:p>
-          <a:p>
-            <a:r>
-              <a:rPr lang="en-IN" b="1" dirty="0"/>
-              <a:t>5. Device-aware semantic cache</a:t>
-            </a:r>
-          </a:p>
-          <a:p>
-            <a:r>
-              <a:rPr lang="en-IN" dirty="0"/>
-              <a:t>Similar queries are matched while maintaining device isolation.</a:t>
-            </a:r>
-          </a:p>
-          <a:p>
-            <a:r>
-              <a:rPr lang="en-IN" b="1" dirty="0"/>
-              <a:t>6. Grounded response generation</a:t>
-            </a:r>
-          </a:p>
-          <a:p>
-            <a:r>
-              <a:rPr lang="en-IN" dirty="0"/>
-              <a:t>Troubleshooting actions are derived from the supplied troubleshooting knowledge.</a:t>
-            </a:r>
-          </a:p>
-          <a:p>
-            <a:r>
-              <a:rPr lang="en-IN" b="1" dirty="0"/>
-              <a:t>7. Zero-URL-leak protection</a:t>
-            </a:r>
-          </a:p>
-          <a:p>
-            <a:r>
-              <a:rPr lang="en-IN" dirty="0"/>
-              <a:t>Prevents unwanted URLs from leaking into the final response.</a:t>
-            </a:r>
-          </a:p>
-        </p:txBody>
-      </p:sp>
+      </p:pic>
     </p:spTree>
+    <p:extLst>
+      <p:ext uri="{BB962C8B-B14F-4D97-AF65-F5344CB8AC3E}">
+        <p14:creationId xmlns:p14="http://schemas.microsoft.com/office/powerpoint/2010/main" val="3217949089"/>
+      </p:ext>
+    </p:extLst>
   </p:cSld>
   <p:clrMapOvr>
     <a:masterClrMapping/>
